--- a/pptx/midterm/REMUS_Progress_Slide_8.pptx
+++ b/pptx/midterm/REMUS_Progress_Slide_8.pptx
@@ -5,10 +5,10 @@
     <p:sldMasterId xmlns:r="http://schemas.openxmlformats.org/officeDocument/2006/relationships" id="2147483648" r:id="rId1"/>
   </p:sldMasterIdLst>
   <p:notesMasterIdLst>
-    <p:notesMasterId r:id="R93363f4614724424"/>
+    <p:notesMasterId r:id="R56ef24ee53dd40db"/>
   </p:notesMasterIdLst>
   <p:sldIdLst>
-    <p:sldId id="256" r:id="Rb8c317fad975419d"/>
+    <p:sldId id="256" r:id="R01d6c9e1f2dd4107"/>
   </p:sldIdLst>
   <p:sldSz cx="12192000" cy="6858000" type="screen16x9"/>
   <p:notesSz cx="6858000" cy="9144000"/>
@@ -471,7 +471,7 @@
           <a:p xmlns:a="http://schemas.openxmlformats.org/drawingml/2006/main">
             <a:r>
               <a:rPr lang="en-US"/>
-              <a:t>REMUS implements adaptive RTL granularity selection, weighted hypergraph partitioning using KaHyPar, and path-cut analysis for LI-TDM configuration. The author reports preliminary observations on well-structured hierarchical designs: graph size around one tenth and hypergraph solver time around one seventh of the netlist-level baseline, with similar Cut Size, scalar balance and Path-Cut Number. The baseline runs are not finished. These ratios are NOT finalized results and are omitted from the slide. Confirm matched DUTs, configurations, graph-size definition and timing boundaries before publishing quantitative gains. Solver time is not total transformation time. The main chart uses archived KMH two-Part Vivado 2024.2 synthesis results: Part 0 LUT/FF/BRAM utilization 73.18/17.66/14.31 percent; Part 1 75.77/8.17/0.00 percent. BRAM counts are 288.5 and 0 tiles. URAM is 13 versus 0, omitted from the plot for focus. The scope is role_i/ClockResetCore_0/emu_system, including inserted infrastructure; not pure DUT, full board consumption, or post-route utilization. The denominator is whole-device capacity, not the remaining Part budget. The observed resource asymmetry does not isolate adaptive granularity or scalar weights as its sole cause. Constraints, module grouping and synthesis mapping may also matter. Exact build matching between partition summaries and synthesis reports remains to be completed, so no estimation-error or baseline-gain inference is made from their combination. This motivates the resource-modeling discussion and proposed multidimensional constraints on slide 11, without asserting that the planned improvement is already proven. Sources: experiments/synthesis-utilization.md (3.2); src/midterm/progress/partitioning.tex; src/midterm/problems.tex.</a:t>
+              <a:t>REMUS implements adaptive RTL granularity selection, weighted hypergraph partitioning using KaHyPar, and path-cut analysis for LI-TDM configuration. The author's revised slide reports graph size around one tenth of the netlist-level baseline, with no significant change in cut-size and path-cut number. These are author-reported comparisons; this slide synchronization does not independently validate the baseline runs. Confirm matched DUTs, configurations and graph-size definitions when finalizing the experimental record. The main chart uses archived KMH two-Part Vivado 2024.2 synthesis results: Part 0 LUT/FF/BRAM utilization 73.18/17.66/14.31 percent; Part 1 75.77/8.17/0.00 percent. BRAM counts are 288.5 and 0 tiles. URAM is 13 versus 0, omitted from the plot for focus. The scope is role_i/ClockResetCore_0/emu_system, including inserted infrastructure; not pure DUT, full board consumption, or post-route utilization. The denominator is whole-device capacity, not the remaining Part budget. The observed resource asymmetry does not isolate adaptive granularity or scalar weights as its sole cause. Constraints, module grouping and synthesis mapping may also matter. Exact build matching between partition summaries and synthesis reports remains to be completed, so no estimation-error or baseline-gain inference is made from their combination. Sources: experiments/synthesis-utilization.md (3.2); src/midterm/progress/partitioning.tex; src/midterm/problems.tex.</a:t>
             </a:r>
           </a:p>
         </p:txBody>
@@ -777,7 +777,10 @@
 <file path=ppt/slides/charts/chart1.xml><?xml version="1.0" encoding="utf-8"?>
 <c:chartSpace xmlns:c="http://schemas.openxmlformats.org/drawingml/2006/chart">
   <c:date1904 val="0"/>
+  <c:roundedCorners val="1"/>
+  <c:style val="2"/>
   <c:chart>
+    <c:autoTitleDeleted val="1"/>
     <c:plotArea>
       <c:layout/>
       <c:barChart>
@@ -796,6 +799,44 @@
             </a:solidFill>
           </c:spPr>
           <c:invertIfNegative val="0"/>
+          <c:dLbls xmlns:c="http://schemas.openxmlformats.org/drawingml/2006/chart">
+            <c:spPr>
+              <a:noFill xmlns:a="http://schemas.openxmlformats.org/drawingml/2006/main"/>
+              <a:ln xmlns:a="http://schemas.openxmlformats.org/drawingml/2006/main">
+                <a:noFill/>
+              </a:ln>
+              <a:effectLst xmlns:a="http://schemas.openxmlformats.org/drawingml/2006/main"/>
+            </c:spPr>
+            <c:txPr>
+              <a:bodyPr xmlns:a="http://schemas.openxmlformats.org/drawingml/2006/main"/>
+              <a:lstStyle xmlns:a="http://schemas.openxmlformats.org/drawingml/2006/main"/>
+              <a:p xmlns:a="http://schemas.openxmlformats.org/drawingml/2006/main">
+                <a:pPr>
+                  <a:defRPr sz="1800">
+                    <a:solidFill>
+                      <a:srgbClr val="20354A"/>
+                    </a:solidFill>
+                    <a:latin typeface="Arial"/>
+                    <a:ea typeface="Arial"/>
+                  </a:defRPr>
+                </a:pPr>
+                <a:endParaRPr lang="en-CN"/>
+              </a:p>
+            </c:txPr>
+            <c:dLblPos val="outEnd"/>
+            <c:showLegendKey val="0"/>
+            <c:showVal val="1"/>
+            <c:showCatName val="0"/>
+            <c:showSerName val="0"/>
+            <c:showPercent val="0"/>
+            <c:showBubbleSize val="1"/>
+            <c:showLeaderLines val="0"/>
+            <c:extLst>
+              <c:ext xmlns:c15="http://schemas.microsoft.com/office/drawing/2012/chart" uri="{CE6537A1-D6FC-4f65-9D91-7224C49458BB}">
+                <c15:showLeaderLines val="0"/>
+              </c:ext>
+            </c:extLst>
+          </c:dLbls>
           <c:cat>
             <c:strLit>
               <c:ptCount val="3"/>
@@ -838,6 +879,44 @@
             </a:solidFill>
           </c:spPr>
           <c:invertIfNegative val="0"/>
+          <c:dLbls xmlns:c="http://schemas.openxmlformats.org/drawingml/2006/chart">
+            <c:spPr>
+              <a:noFill xmlns:a="http://schemas.openxmlformats.org/drawingml/2006/main"/>
+              <a:ln xmlns:a="http://schemas.openxmlformats.org/drawingml/2006/main">
+                <a:noFill/>
+              </a:ln>
+              <a:effectLst xmlns:a="http://schemas.openxmlformats.org/drawingml/2006/main"/>
+            </c:spPr>
+            <c:txPr>
+              <a:bodyPr xmlns:a="http://schemas.openxmlformats.org/drawingml/2006/main"/>
+              <a:lstStyle xmlns:a="http://schemas.openxmlformats.org/drawingml/2006/main"/>
+              <a:p xmlns:a="http://schemas.openxmlformats.org/drawingml/2006/main">
+                <a:pPr>
+                  <a:defRPr sz="1800">
+                    <a:solidFill>
+                      <a:srgbClr val="20354A"/>
+                    </a:solidFill>
+                    <a:latin typeface="Arial"/>
+                    <a:ea typeface="Arial"/>
+                  </a:defRPr>
+                </a:pPr>
+                <a:endParaRPr lang="en-CN"/>
+              </a:p>
+            </c:txPr>
+            <c:dLblPos val="outEnd"/>
+            <c:showLegendKey val="0"/>
+            <c:showVal val="1"/>
+            <c:showCatName val="0"/>
+            <c:showSerName val="0"/>
+            <c:showPercent val="0"/>
+            <c:showBubbleSize val="1"/>
+            <c:showLeaderLines val="0"/>
+            <c:extLst>
+              <c:ext xmlns:c15="http://schemas.microsoft.com/office/drawing/2012/chart" uri="{CE6537A1-D6FC-4f65-9D91-7224C49458BB}">
+                <c15:showLeaderLines val="0"/>
+              </c:ext>
+            </c:extLst>
+          </c:dLbls>
           <c:cat>
             <c:strLit>
               <c:ptCount val="3"/>
@@ -869,27 +948,13 @@
           </c:val>
         </c:ser>
         <c:dLbls>
-          <c:txPr>
-            <a:bodyPr xmlns:a="http://schemas.openxmlformats.org/drawingml/2006/main"/>
-            <a:lstStyle xmlns:a="http://schemas.openxmlformats.org/drawingml/2006/main"/>
-            <a:p xmlns:a="http://schemas.openxmlformats.org/drawingml/2006/main">
-              <a:pPr>
-                <a:defRPr sz="1800">
-                  <a:solidFill>
-                    <a:srgbClr val="20354A"/>
-                  </a:solidFill>
-                  <a:latin typeface="Arial"/>
-                  <a:ea typeface="Arial"/>
-                </a:defRPr>
-              </a:pPr>
-            </a:p>
-          </c:txPr>
           <c:dLblPos val="outEnd"/>
           <c:showLegendKey val="0"/>
           <c:showVal val="1"/>
           <c:showCatName val="0"/>
           <c:showSerName val="0"/>
           <c:showPercent val="0"/>
+          <c:showBubbleSize val="1"/>
         </c:dLbls>
         <c:gapWidth val="90"/>
         <c:overlap val="-15"/>
@@ -906,7 +971,7 @@
         <c:majorTickMark val="out"/>
         <c:minorTickMark val="none"/>
         <c:tickLblPos val="nextTo"/>
-        <c:txPr>
+        <c:txPr xmlns:c="http://schemas.openxmlformats.org/drawingml/2006/chart">
           <a:bodyPr xmlns:a="http://schemas.openxmlformats.org/drawingml/2006/main"/>
           <a:lstStyle xmlns:a="http://schemas.openxmlformats.org/drawingml/2006/main"/>
           <a:p xmlns:a="http://schemas.openxmlformats.org/drawingml/2006/main">
@@ -919,6 +984,7 @@
                 <a:ea typeface="Arial"/>
               </a:defRPr>
             </a:pPr>
+            <a:endParaRPr lang="en-CN"/>
           </a:p>
         </c:txPr>
         <c:crossAx val="2"/>
@@ -937,7 +1003,7 @@
         <c:delete val="0"/>
         <c:axPos val="l"/>
         <c:majorGridlines>
-          <c:spPr>
+          <c:spPr xmlns:c="http://schemas.openxmlformats.org/drawingml/2006/chart">
             <a:ln xmlns:a="http://schemas.openxmlformats.org/drawingml/2006/main" w="6350">
               <a:solidFill>
                 <a:srgbClr val="DDE5EA"/>
@@ -949,7 +1015,7 @@
         <c:majorTickMark val="out"/>
         <c:minorTickMark val="none"/>
         <c:tickLblPos val="nextTo"/>
-        <c:txPr>
+        <c:txPr xmlns:c="http://schemas.openxmlformats.org/drawingml/2006/chart">
           <a:bodyPr xmlns:a="http://schemas.openxmlformats.org/drawingml/2006/main"/>
           <a:lstStyle xmlns:a="http://schemas.openxmlformats.org/drawingml/2006/main"/>
           <a:p xmlns:a="http://schemas.openxmlformats.org/drawingml/2006/main">
@@ -962,6 +1028,7 @@
                 <a:ea typeface="Arial"/>
               </a:defRPr>
             </a:pPr>
+            <a:endParaRPr lang="en-CN"/>
           </a:p>
         </c:txPr>
         <c:crossAx val="1"/>
@@ -1006,8 +1073,8 @@
 </file>
 
 <file path=ppt/slides/slide1.xml><?xml version="1.0" encoding="utf-8"?>
-<p:sld xmlns:a="http://schemas.openxmlformats.org/drawingml/2006/main" xmlns:p="http://schemas.openxmlformats.org/presentationml/2006/main">
-  <p:cSld>
+<p:sld xmlns:a="http://schemas.openxmlformats.org/drawingml/2006/main" xmlns:r="http://schemas.openxmlformats.org/officeDocument/2006/relationships" xmlns:c="http://schemas.openxmlformats.org/drawingml/2006/chart" xmlns:p="http://schemas.openxmlformats.org/presentationml/2006/main">
+  <p:cSld xmlns:a="http://schemas.openxmlformats.org/drawingml/2006/main" xmlns:p="http://schemas.openxmlformats.org/presentationml/2006/main" xmlns:r="http://schemas.openxmlformats.org/officeDocument/2006/relationships" xmlns:c="http://schemas.openxmlformats.org/drawingml/2006/chart">
     <p:bg>
       <p:bgPr>
         <a:solidFill xmlns:a="http://schemas.openxmlformats.org/drawingml/2006/main">
@@ -1045,16 +1112,35 @@
             <a:noAutofit/>
           </a:bodyPr>
           <a:lstStyle xmlns:a="http://schemas.openxmlformats.org/drawingml/2006/main"/>
-          <a:p xmlns:a="http://schemas.openxmlformats.org/drawingml/2006/main">
+          <a:p>
+            <a:pPr algn="l">
+              <a:lnSpc>
+                <a:spcPct val="90000"/>
+              </a:lnSpc>
+              <a:defRPr sz="3000" b="1">
+                <a:solidFill>
+                  <a:srgbClr val="183B56"/>
+                </a:solidFill>
+                <a:latin typeface="Arial"/>
+                <a:ea typeface="Arial"/>
+              </a:defRPr>
+            </a:pPr>
             <a:r>
               <a:rPr lang="en-US" sz="3000" b="1">
                 <a:solidFill>
                   <a:srgbClr val="183B56"/>
                 </a:solidFill>
-                <a:latin typeface="Arial"/>
-                <a:ea typeface="Arial"/>
-              </a:rPr>
-              <a:t>8. Automated Multi-FPGA Circuit Partitioning</a:t>
+              </a:rPr>
+              <a:t xml:space="preserve">Progress3: Automated </a:t>
+            </a:r>
+            <a:r>
+              <a:rPr lang="en-US" sz="3000" b="1">
+                <a:solidFill>
+                  <a:srgbClr val="183B56"/>
+                </a:solidFill>
+                <a:latin typeface="Arial"/>
+              </a:rPr>
+              <a:t>Multi-FPGA Circuit Partitioning</a:t>
             </a:r>
           </a:p>
         </p:txBody>
@@ -1382,25 +1468,32 @@
           </a:bodyPr>
           <a:lstStyle/>
           <a:p>
+            <a:pPr algn="l">
+              <a:defRPr sz="1900" b="0">
+                <a:solidFill>
+                  <a:srgbClr val="20354A"/>
+                </a:solidFill>
+                <a:latin typeface="Arial"/>
+                <a:ea typeface="Arial"/>
+              </a:defRPr>
+            </a:pPr>
+            <a:r>
+              <a:rPr sz="1900">
+                <a:solidFill>
+                  <a:srgbClr val="20354A"/>
+                </a:solidFill>
+                <a:latin typeface="Arial"/>
+              </a:rPr>
+              <a:t>Path-cut number analysis</a:t>
+            </a:r>
+          </a:p>
+          <a:p>
             <a:r>
               <a:rPr lang="en-US" sz="1900">
                 <a:solidFill>
                   <a:srgbClr val="20354A"/>
                 </a:solidFill>
                 <a:latin typeface="Arial"/>
-                <a:ea typeface="Arial"/>
-              </a:rPr>
-              <a:t>Path-cut analysis</a:t>
-            </a:r>
-          </a:p>
-          <a:p>
-            <a:r>
-              <a:rPr lang="en-US" sz="1900">
-                <a:solidFill>
-                  <a:srgbClr val="20354A"/>
-                </a:solidFill>
-                <a:latin typeface="Arial"/>
-                <a:ea typeface="Arial"/>
               </a:rPr>
               <a:t>for LI-TDM</a:t>
             </a:r>
@@ -1415,8 +1508,8 @@
         </p:nvSpPr>
         <p:spPr>
           <a:xfrm>
-            <a:off x="365760" y="4965192"/>
-            <a:ext cx="3611880" cy="320040"/>
+            <a:off x="365760" y="4732020"/>
+            <a:ext cx="3950208" cy="2386232"/>
           </a:xfrm>
           <a:prstGeom prst="rect">
             <a:avLst/>
@@ -1432,29 +1525,153 @@
           </a:bodyPr>
           <a:lstStyle/>
           <a:p>
-            <a:r>
-              <a:rPr lang="en-US" sz="1400">
-                <a:solidFill>
-                  <a:srgbClr val="607184"/>
+            <a:pPr algn="l">
+              <a:defRPr sz="1800" b="0">
+                <a:solidFill>
+                  <a:srgbClr val="183B56"/>
                 </a:solidFill>
                 <a:latin typeface="Arial"/>
                 <a:ea typeface="Arial"/>
-              </a:rPr>
-              <a:t>Preliminary observation</a:t>
-            </a:r>
-          </a:p>
-        </p:txBody>
-      </p:sp>
-      <p:sp>
-        <p:nvSpPr>
-          <p:cNvPr id="100009" name="S08.Efficiency.Text"/>
+              </a:defRPr>
+            </a:pPr>
+            <a:r>
+              <a:rPr sz="2200" b="1">
+                <a:solidFill>
+                  <a:srgbClr val="183B56"/>
+                </a:solidFill>
+                <a:latin typeface="Arial"/>
+              </a:rPr>
+              <a:t>Experimental Results:</a:t>
+            </a:r>
+          </a:p>
+          <a:p>
+            <a:endParaRPr lang="en-US"/>
+          </a:p>
+          <a:p>
+            <a:pPr marL="285750" indent="-285750">
+              <a:buFont xmlns:a="http://schemas.openxmlformats.org/drawingml/2006/main" typeface="Arial" panose="020B0604020202020204" pitchFamily="34" charset="0"/>
+              <a:buChar xmlns:a="http://schemas.openxmlformats.org/drawingml/2006/main" char="•"/>
+            </a:pPr>
+            <a:r>
+              <a:rPr lang="en-US">
+                <a:solidFill>
+                  <a:srgbClr val="183B56"/>
+                </a:solidFill>
+              </a:rPr>
+              <a:t xml:space="preserve">The hypergraph size was reduced to </a:t>
+            </a:r>
+            <a:r>
+              <a:rPr lang="en-US">
+                <a:solidFill>
+                  <a:srgbClr val="183B56"/>
+                </a:solidFill>
+              </a:rPr>
+              <a:t>1/10</a:t>
+            </a:r>
+            <a:endParaRPr lang="en-US"/>
+          </a:p>
+          <a:p>
+            <a:pPr marL="285750" indent="-285750">
+              <a:buFont xmlns:a="http://schemas.openxmlformats.org/drawingml/2006/main" typeface="Arial" panose="020B0604020202020204" pitchFamily="34" charset="0"/>
+              <a:buChar xmlns:a="http://schemas.openxmlformats.org/drawingml/2006/main" char="•"/>
+            </a:pPr>
+            <a:r>
+              <a:rPr lang="en-US">
+                <a:solidFill>
+                  <a:srgbClr val="183B56"/>
+                </a:solidFill>
+              </a:rPr>
+              <a:t>No significant change in the</a:t>
+            </a:r>
+            <a:r>
+              <a:rPr lang="en-US">
+                <a:solidFill>
+                  <a:srgbClr val="183B56"/>
+                </a:solidFill>
+              </a:rPr>
+              <a:t xml:space="preserve"> </a:t>
+            </a:r>
+            <a:r>
+              <a:rPr lang="en-US">
+                <a:solidFill>
+                  <a:srgbClr val="183B56"/>
+                </a:solidFill>
+              </a:rPr>
+              <a:t>c</a:t>
+            </a:r>
+            <a:r>
+              <a:rPr lang="en-US">
+                <a:solidFill>
+                  <a:srgbClr val="183B56"/>
+                </a:solidFill>
+              </a:rPr>
+              <a:t>ut</a:t>
+            </a:r>
+            <a:r>
+              <a:rPr lang="en-US">
+                <a:solidFill>
+                  <a:srgbClr val="183B56"/>
+                </a:solidFill>
+              </a:rPr>
+              <a:t>-</a:t>
+            </a:r>
+            <a:r>
+              <a:rPr lang="en-US">
+                <a:solidFill>
+                  <a:srgbClr val="183B56"/>
+                </a:solidFill>
+              </a:rPr>
+              <a:t>size and path</a:t>
+            </a:r>
+            <a:r>
+              <a:rPr lang="en-US">
+                <a:solidFill>
+                  <a:srgbClr val="183B56"/>
+                </a:solidFill>
+              </a:rPr>
+              <a:t>-</a:t>
+            </a:r>
+            <a:r>
+              <a:rPr lang="en-US">
+                <a:solidFill>
+                  <a:srgbClr val="183B56"/>
+                </a:solidFill>
+              </a:rPr>
+              <a:t>cut</a:t>
+            </a:r>
+            <a:r>
+              <a:rPr lang="en-US">
+                <a:solidFill>
+                  <a:srgbClr val="183B56"/>
+                </a:solidFill>
+              </a:rPr>
+              <a:t xml:space="preserve"> </a:t>
+            </a:r>
+            <a:r>
+              <a:rPr lang="en-US">
+                <a:solidFill>
+                  <a:srgbClr val="183B56"/>
+                </a:solidFill>
+              </a:rPr>
+              <a:t>number</a:t>
+            </a:r>
+            <a:endParaRPr lang="en-US"/>
+          </a:p>
+          <a:p>
+            <a:endParaRPr lang="en-US"/>
+          </a:p>
+        </p:txBody>
+      </p:sp>
+      <p:sp>
+        <p:nvSpPr>
+          <p:cNvPr id="100010" name="S08.Results.Heading"/>
           <p:cNvSpPr txBox="1"/>
           <p:nvPr/>
         </p:nvSpPr>
         <p:spPr>
           <a:xfrm>
-            <a:off x="365760" y="5367528"/>
-            <a:ext cx="3611880" cy="960120"/>
+            <a:off x="4370832" y="1097280"/>
+            <a:ext cx="7479792" cy="457200"/>
           </a:xfrm>
           <a:prstGeom prst="rect">
             <a:avLst/>
@@ -1471,40 +1688,28 @@
           <a:lstStyle/>
           <a:p>
             <a:r>
-              <a:rPr lang="en-US" sz="1800">
+              <a:rPr lang="en-US" sz="2200" b="1">
                 <a:solidFill>
                   <a:srgbClr val="183B56"/>
                 </a:solidFill>
                 <a:latin typeface="Arial"/>
                 <a:ea typeface="Arial"/>
               </a:rPr>
-              <a:t>Smaller graphs and faster solving</a:t>
-            </a:r>
-          </a:p>
-          <a:p>
-            <a:r>
-              <a:rPr lang="en-US" sz="1800">
-                <a:solidFill>
-                  <a:srgbClr val="183B56"/>
-                </a:solidFill>
-                <a:latin typeface="Arial"/>
-                <a:ea typeface="Arial"/>
-              </a:rPr>
-              <a:t>on well-structured RTL.</a:t>
-            </a:r>
-          </a:p>
-        </p:txBody>
-      </p:sp>
-      <p:sp>
-        <p:nvSpPr>
-          <p:cNvPr id="100010" name="S08.Results.Heading"/>
+              <a:t>Post-Synthesis Resource Utilization</a:t>
+            </a:r>
+          </a:p>
+        </p:txBody>
+      </p:sp>
+      <p:sp>
+        <p:nvSpPr>
+          <p:cNvPr id="100011" name="S08.Results.Context"/>
           <p:cNvSpPr txBox="1"/>
           <p:nvPr/>
         </p:nvSpPr>
         <p:spPr>
           <a:xfrm>
-            <a:off x="4370832" y="1097280"/>
-            <a:ext cx="7479792" cy="457200"/>
+            <a:off x="4370832" y="1609344"/>
+            <a:ext cx="7479792" cy="320040"/>
           </a:xfrm>
           <a:prstGeom prst="rect">
             <a:avLst/>
@@ -1520,51 +1725,21 @@
           </a:bodyPr>
           <a:lstStyle/>
           <a:p>
-            <a:r>
-              <a:rPr lang="en-US" sz="2200" b="1">
+            <a:pPr algn="l">
+              <a:defRPr sz="1800" b="0">
                 <a:solidFill>
                   <a:srgbClr val="183B56"/>
                 </a:solidFill>
                 <a:latin typeface="Arial"/>
                 <a:ea typeface="Arial"/>
-              </a:rPr>
-              <a:t>Post-Synthesis Resource Utilization</a:t>
-            </a:r>
-          </a:p>
-        </p:txBody>
-      </p:sp>
-      <p:sp>
-        <p:nvSpPr>
-          <p:cNvPr id="100011" name="S08.Results.Context"/>
-          <p:cNvSpPr txBox="1"/>
-          <p:nvPr/>
-        </p:nvSpPr>
-        <p:spPr>
-          <a:xfrm>
-            <a:off x="4370832" y="1609344"/>
-            <a:ext cx="7479792" cy="320040"/>
-          </a:xfrm>
-          <a:prstGeom prst="rect">
-            <a:avLst/>
-          </a:prstGeom>
-          <a:noFill/>
-          <a:ln>
-            <a:noFill/>
-          </a:ln>
-        </p:spPr>
-        <p:txBody>
-          <a:bodyPr lIns="0" tIns="0" rIns="0" bIns="0">
-            <a:noAutofit/>
-          </a:bodyPr>
-          <a:lstStyle/>
-          <a:p>
-            <a:r>
-              <a:rPr lang="en-US" sz="1600">
-                <a:solidFill>
-                  <a:srgbClr val="607184"/>
-                </a:solidFill>
-                <a:latin typeface="Arial"/>
-                <a:ea typeface="Arial"/>
+              </a:defRPr>
+            </a:pPr>
+            <a:r>
+              <a:rPr>
+                <a:solidFill>
+                  <a:srgbClr val="183B56"/>
+                </a:solidFill>
+                <a:latin typeface="Arial"/>
               </a:rPr>
               <a:t>KMH · Two partitions · Utilization (%)</a:t>
             </a:r>
@@ -1583,7 +1758,7 @@
         </p:xfrm>
         <a:graphic>
           <a:graphicData uri="http://schemas.openxmlformats.org/drawingml/2006/chart">
-            <c:chart xmlns:r="http://schemas.openxmlformats.org/officeDocument/2006/relationships" xmlns:c="http://schemas.openxmlformats.org/drawingml/2006/chart" r:id="R77872e11e53f41fe"/>
+            <c:chart xmlns:r="http://schemas.openxmlformats.org/officeDocument/2006/relationships" xmlns:c="http://schemas.openxmlformats.org/drawingml/2006/chart" r:id="R8eeb2f2b5517482c"/>
           </a:graphicData>
         </a:graphic>
       </p:graphicFrame>
@@ -1595,7 +1770,7 @@
         </p:nvSpPr>
         <p:spPr>
           <a:xfrm>
-            <a:off x="4370832" y="5687568"/>
+            <a:off x="5285232" y="5760720"/>
             <a:ext cx="7479792" cy="594360"/>
           </a:xfrm>
           <a:prstGeom prst="rect">
@@ -1650,16 +1825,16 @@
           </a:bodyPr>
           <a:lstStyle/>
           <a:p>
-            <a:r>
-              <a:rPr lang="en-US" sz="1200">
+            <a:pPr algn="l">
+              <a:defRPr sz="1200" b="0">
                 <a:solidFill>
                   <a:srgbClr val="607184"/>
                 </a:solidFill>
                 <a:latin typeface="Arial"/>
                 <a:ea typeface="Arial"/>
-              </a:rPr>
-              <a:t>EMU_SYSTEM synthesis; percentages of device capacity.</a:t>
-            </a:r>
+              </a:defRPr>
+            </a:pPr>
+            <a:endParaRPr sz="1200"/>
           </a:p>
         </p:txBody>
       </p:sp>

--- a/pptx/midterm/REMUS_Progress_Slide_8.pptx
+++ b/pptx/midterm/REMUS_Progress_Slide_8.pptx
@@ -5,10 +5,10 @@
     <p:sldMasterId xmlns:r="http://schemas.openxmlformats.org/officeDocument/2006/relationships" id="2147483648" r:id="rId1"/>
   </p:sldMasterIdLst>
   <p:notesMasterIdLst>
-    <p:notesMasterId r:id="R56ef24ee53dd40db"/>
+    <p:notesMasterId r:id="R78d21a28270e4d44"/>
   </p:notesMasterIdLst>
   <p:sldIdLst>
-    <p:sldId id="256" r:id="R01d6c9e1f2dd4107"/>
+    <p:sldId id="256" r:id="Rf3251fa1bb4b4d1b"/>
   </p:sldIdLst>
   <p:sldSz cx="12192000" cy="6858000" type="screen16x9"/>
   <p:notesSz cx="6858000" cy="9144000"/>
@@ -337,13 +337,13 @@
         <a:srgbClr val="E7E6E6"/>
       </a:lt2>
       <a:accent1>
-        <a:srgbClr val="183B56"/>
+        <a:srgbClr val="C00000"/>
       </a:accent1>
       <a:accent2>
-        <a:srgbClr val="008C95"/>
+        <a:srgbClr val="70AD47"/>
       </a:accent2>
       <a:accent3>
-        <a:srgbClr val="DF973E"/>
+        <a:srgbClr val="ED7D31"/>
       </a:accent3>
       <a:accent4>
         <a:srgbClr val="FFC000"/>
@@ -795,7 +795,7 @@
           </c:tx>
           <c:spPr>
             <a:solidFill xmlns:a="http://schemas.openxmlformats.org/drawingml/2006/main">
-              <a:srgbClr val="183B56"/>
+              <a:srgbClr val="333333"/>
             </a:solidFill>
           </c:spPr>
           <c:invertIfNegative val="0"/>
@@ -814,7 +814,7 @@
                 <a:pPr>
                   <a:defRPr sz="1800">
                     <a:solidFill>
-                      <a:srgbClr val="20354A"/>
+                      <a:srgbClr val="1F1F1F"/>
                     </a:solidFill>
                     <a:latin typeface="Arial"/>
                     <a:ea typeface="Arial"/>
@@ -875,7 +875,7 @@
           </c:tx>
           <c:spPr>
             <a:solidFill xmlns:a="http://schemas.openxmlformats.org/drawingml/2006/main">
-              <a:srgbClr val="008C95"/>
+              <a:srgbClr val="70AD47"/>
             </a:solidFill>
           </c:spPr>
           <c:invertIfNegative val="0"/>
@@ -894,7 +894,7 @@
                 <a:pPr>
                   <a:defRPr sz="1800">
                     <a:solidFill>
-                      <a:srgbClr val="20354A"/>
+                      <a:srgbClr val="1F1F1F"/>
                     </a:solidFill>
                     <a:latin typeface="Arial"/>
                     <a:ea typeface="Arial"/>
@@ -978,7 +978,7 @@
             <a:pPr>
               <a:defRPr sz="1600">
                 <a:solidFill>
-                  <a:srgbClr val="20354A"/>
+                  <a:srgbClr val="1F1F1F"/>
                 </a:solidFill>
                 <a:latin typeface="Arial"/>
                 <a:ea typeface="Arial"/>
@@ -1006,7 +1006,7 @@
           <c:spPr xmlns:c="http://schemas.openxmlformats.org/drawingml/2006/chart">
             <a:ln xmlns:a="http://schemas.openxmlformats.org/drawingml/2006/main" w="6350">
               <a:solidFill>
-                <a:srgbClr val="DDE5EA"/>
+                <a:srgbClr val="DEDEDE"/>
               </a:solidFill>
             </a:ln>
           </c:spPr>
@@ -1022,7 +1022,7 @@
             <a:pPr>
               <a:defRPr sz="1600">
                 <a:solidFill>
-                  <a:srgbClr val="20354A"/>
+                  <a:srgbClr val="1F1F1F"/>
                 </a:solidFill>
                 <a:latin typeface="Arial"/>
                 <a:ea typeface="Arial"/>
@@ -1052,7 +1052,7 @@
           <a:pPr>
             <a:defRPr sz="1500">
               <a:solidFill>
-                <a:srgbClr val="20354A"/>
+                <a:srgbClr val="1F1F1F"/>
               </a:solidFill>
               <a:latin typeface="Arial"/>
               <a:ea typeface="Arial"/>
@@ -1119,7 +1119,7 @@
               </a:lnSpc>
               <a:defRPr sz="3000" b="1">
                 <a:solidFill>
-                  <a:srgbClr val="183B56"/>
+                  <a:srgbClr val="C00000"/>
                 </a:solidFill>
                 <a:latin typeface="Arial"/>
                 <a:ea typeface="Arial"/>
@@ -1128,7 +1128,7 @@
             <a:r>
               <a:rPr lang="en-US" sz="3000" b="1">
                 <a:solidFill>
-                  <a:srgbClr val="183B56"/>
+                  <a:srgbClr val="C00000"/>
                 </a:solidFill>
               </a:rPr>
               <a:t xml:space="preserve">Progress3: Automated </a:t>
@@ -1136,7 +1136,7 @@
             <a:r>
               <a:rPr lang="en-US" sz="3000" b="1">
                 <a:solidFill>
-                  <a:srgbClr val="183B56"/>
+                  <a:srgbClr val="C00000"/>
                 </a:solidFill>
                 <a:latin typeface="Arial"/>
               </a:rPr>
@@ -1160,10 +1160,12 @@
             <a:avLst/>
           </a:prstGeom>
           <a:solidFill>
-            <a:srgbClr val="008C95"/>
+            <a:srgbClr val="C55A11"/>
           </a:solidFill>
           <a:ln>
-            <a:noFill/>
+            <a:solidFill>
+              <a:srgbClr val="C55A11"/>
+            </a:solidFill>
           </a:ln>
         </p:spPr>
         <p:txBody>
@@ -1174,7 +1176,7 @@
           <a:p>
             <a:endParaRPr lang="en-US" sz="1800">
               <a:solidFill>
-                <a:srgbClr val="20354A"/>
+                <a:srgbClr val="C55A11"/>
               </a:solidFill>
               <a:latin typeface="Arial"/>
               <a:ea typeface="Arial"/>
@@ -1210,7 +1212,7 @@
             <a:r>
               <a:rPr lang="en-US" sz="2200" b="1">
                 <a:solidFill>
-                  <a:srgbClr val="183B56"/>
+                  <a:srgbClr val="333333"/>
                 </a:solidFill>
                 <a:latin typeface="Arial"/>
                 <a:ea typeface="Arial"/>
@@ -1235,7 +1237,7 @@
             <a:avLst/>
           </a:prstGeom>
           <a:solidFill>
-            <a:srgbClr val="008C95"/>
+            <a:srgbClr val="70AD47"/>
           </a:solidFill>
           <a:ln>
             <a:noFill/>
@@ -1289,7 +1291,7 @@
             <a:r>
               <a:rPr lang="en-US" sz="1900">
                 <a:solidFill>
-                  <a:srgbClr val="20354A"/>
+                  <a:srgbClr val="1F1F1F"/>
                 </a:solidFill>
                 <a:latin typeface="Arial"/>
                 <a:ea typeface="Arial"/>
@@ -1301,7 +1303,7 @@
             <a:r>
               <a:rPr lang="en-US" sz="1900">
                 <a:solidFill>
-                  <a:srgbClr val="20354A"/>
+                  <a:srgbClr val="1F1F1F"/>
                 </a:solidFill>
                 <a:latin typeface="Arial"/>
                 <a:ea typeface="Arial"/>
@@ -1326,7 +1328,7 @@
             <a:avLst/>
           </a:prstGeom>
           <a:solidFill>
-            <a:srgbClr val="008C95"/>
+            <a:srgbClr val="70AD47"/>
           </a:solidFill>
           <a:ln>
             <a:noFill/>
@@ -1380,7 +1382,7 @@
             <a:r>
               <a:rPr lang="en-US" sz="1900">
                 <a:solidFill>
-                  <a:srgbClr val="20354A"/>
+                  <a:srgbClr val="1F1F1F"/>
                 </a:solidFill>
                 <a:latin typeface="Arial"/>
                 <a:ea typeface="Arial"/>
@@ -1392,7 +1394,7 @@
             <a:r>
               <a:rPr lang="en-US" sz="1900">
                 <a:solidFill>
-                  <a:srgbClr val="20354A"/>
+                  <a:srgbClr val="1F1F1F"/>
                 </a:solidFill>
                 <a:latin typeface="Arial"/>
                 <a:ea typeface="Arial"/>
@@ -1417,7 +1419,7 @@
             <a:avLst/>
           </a:prstGeom>
           <a:solidFill>
-            <a:srgbClr val="008C95"/>
+            <a:srgbClr val="70AD47"/>
           </a:solidFill>
           <a:ln>
             <a:noFill/>
@@ -1471,7 +1473,7 @@
             <a:pPr algn="l">
               <a:defRPr sz="1900" b="0">
                 <a:solidFill>
-                  <a:srgbClr val="20354A"/>
+                  <a:srgbClr val="1F1F1F"/>
                 </a:solidFill>
                 <a:latin typeface="Arial"/>
                 <a:ea typeface="Arial"/>
@@ -1480,7 +1482,7 @@
             <a:r>
               <a:rPr sz="1900">
                 <a:solidFill>
-                  <a:srgbClr val="20354A"/>
+                  <a:srgbClr val="1F1F1F"/>
                 </a:solidFill>
                 <a:latin typeface="Arial"/>
               </a:rPr>
@@ -1491,7 +1493,7 @@
             <a:r>
               <a:rPr lang="en-US" sz="1900">
                 <a:solidFill>
-                  <a:srgbClr val="20354A"/>
+                  <a:srgbClr val="1F1F1F"/>
                 </a:solidFill>
                 <a:latin typeface="Arial"/>
               </a:rPr>
@@ -1528,7 +1530,7 @@
             <a:pPr algn="l">
               <a:defRPr sz="1800" b="0">
                 <a:solidFill>
-                  <a:srgbClr val="183B56"/>
+                  <a:srgbClr val="333333"/>
                 </a:solidFill>
                 <a:latin typeface="Arial"/>
                 <a:ea typeface="Arial"/>
@@ -1537,7 +1539,7 @@
             <a:r>
               <a:rPr sz="2200" b="1">
                 <a:solidFill>
-                  <a:srgbClr val="183B56"/>
+                  <a:srgbClr val="333333"/>
                 </a:solidFill>
                 <a:latin typeface="Arial"/>
               </a:rPr>
@@ -1555,7 +1557,7 @@
             <a:r>
               <a:rPr lang="en-US">
                 <a:solidFill>
-                  <a:srgbClr val="183B56"/>
+                  <a:srgbClr val="333333"/>
                 </a:solidFill>
               </a:rPr>
               <a:t xml:space="preserve">The hypergraph size was reduced to </a:t>
@@ -1563,7 +1565,7 @@
             <a:r>
               <a:rPr lang="en-US">
                 <a:solidFill>
-                  <a:srgbClr val="183B56"/>
+                  <a:srgbClr val="333333"/>
                 </a:solidFill>
               </a:rPr>
               <a:t>1/10</a:t>
@@ -1578,7 +1580,7 @@
             <a:r>
               <a:rPr lang="en-US">
                 <a:solidFill>
-                  <a:srgbClr val="183B56"/>
+                  <a:srgbClr val="333333"/>
                 </a:solidFill>
               </a:rPr>
               <a:t>No significant change in the</a:t>
@@ -1586,7 +1588,7 @@
             <a:r>
               <a:rPr lang="en-US">
                 <a:solidFill>
-                  <a:srgbClr val="183B56"/>
+                  <a:srgbClr val="333333"/>
                 </a:solidFill>
               </a:rPr>
               <a:t xml:space="preserve"> </a:t>
@@ -1594,7 +1596,7 @@
             <a:r>
               <a:rPr lang="en-US">
                 <a:solidFill>
-                  <a:srgbClr val="183B56"/>
+                  <a:srgbClr val="333333"/>
                 </a:solidFill>
               </a:rPr>
               <a:t>c</a:t>
@@ -1602,7 +1604,7 @@
             <a:r>
               <a:rPr lang="en-US">
                 <a:solidFill>
-                  <a:srgbClr val="183B56"/>
+                  <a:srgbClr val="333333"/>
                 </a:solidFill>
               </a:rPr>
               <a:t>ut</a:t>
@@ -1610,7 +1612,7 @@
             <a:r>
               <a:rPr lang="en-US">
                 <a:solidFill>
-                  <a:srgbClr val="183B56"/>
+                  <a:srgbClr val="333333"/>
                 </a:solidFill>
               </a:rPr>
               <a:t>-</a:t>
@@ -1618,7 +1620,7 @@
             <a:r>
               <a:rPr lang="en-US">
                 <a:solidFill>
-                  <a:srgbClr val="183B56"/>
+                  <a:srgbClr val="333333"/>
                 </a:solidFill>
               </a:rPr>
               <a:t>size and path</a:t>
@@ -1626,7 +1628,7 @@
             <a:r>
               <a:rPr lang="en-US">
                 <a:solidFill>
-                  <a:srgbClr val="183B56"/>
+                  <a:srgbClr val="333333"/>
                 </a:solidFill>
               </a:rPr>
               <a:t>-</a:t>
@@ -1634,7 +1636,7 @@
             <a:r>
               <a:rPr lang="en-US">
                 <a:solidFill>
-                  <a:srgbClr val="183B56"/>
+                  <a:srgbClr val="333333"/>
                 </a:solidFill>
               </a:rPr>
               <a:t>cut</a:t>
@@ -1642,7 +1644,7 @@
             <a:r>
               <a:rPr lang="en-US">
                 <a:solidFill>
-                  <a:srgbClr val="183B56"/>
+                  <a:srgbClr val="333333"/>
                 </a:solidFill>
               </a:rPr>
               <a:t xml:space="preserve"> </a:t>
@@ -1650,7 +1652,7 @@
             <a:r>
               <a:rPr lang="en-US">
                 <a:solidFill>
-                  <a:srgbClr val="183B56"/>
+                  <a:srgbClr val="333333"/>
                 </a:solidFill>
               </a:rPr>
               <a:t>number</a:t>
@@ -1690,7 +1692,7 @@
             <a:r>
               <a:rPr lang="en-US" sz="2200" b="1">
                 <a:solidFill>
-                  <a:srgbClr val="183B56"/>
+                  <a:srgbClr val="333333"/>
                 </a:solidFill>
                 <a:latin typeface="Arial"/>
                 <a:ea typeface="Arial"/>
@@ -1728,7 +1730,7 @@
             <a:pPr algn="l">
               <a:defRPr sz="1800" b="0">
                 <a:solidFill>
-                  <a:srgbClr val="183B56"/>
+                  <a:srgbClr val="333333"/>
                 </a:solidFill>
                 <a:latin typeface="Arial"/>
                 <a:ea typeface="Arial"/>
@@ -1737,7 +1739,7 @@
             <a:r>
               <a:rPr>
                 <a:solidFill>
-                  <a:srgbClr val="183B56"/>
+                  <a:srgbClr val="333333"/>
                 </a:solidFill>
                 <a:latin typeface="Arial"/>
               </a:rPr>
@@ -1758,7 +1760,7 @@
         </p:xfrm>
         <a:graphic>
           <a:graphicData uri="http://schemas.openxmlformats.org/drawingml/2006/chart">
-            <c:chart xmlns:r="http://schemas.openxmlformats.org/officeDocument/2006/relationships" xmlns:c="http://schemas.openxmlformats.org/drawingml/2006/chart" r:id="R8eeb2f2b5517482c"/>
+            <c:chart xmlns:r="http://schemas.openxmlformats.org/officeDocument/2006/relationships" xmlns:c="http://schemas.openxmlformats.org/drawingml/2006/chart" r:id="R961f260531874f40"/>
           </a:graphicData>
         </a:graphic>
       </p:graphicFrame>
@@ -1790,7 +1792,7 @@
             <a:r>
               <a:rPr lang="en-US" sz="2000">
                 <a:solidFill>
-                  <a:srgbClr val="183B56"/>
+                  <a:srgbClr val="333333"/>
                 </a:solidFill>
                 <a:latin typeface="Arial"/>
                 <a:ea typeface="Arial"/>
@@ -1828,7 +1830,7 @@
             <a:pPr algn="l">
               <a:defRPr sz="1200" b="0">
                 <a:solidFill>
-                  <a:srgbClr val="607184"/>
+                  <a:srgbClr val="898989"/>
                 </a:solidFill>
                 <a:latin typeface="Arial"/>
                 <a:ea typeface="Arial"/>
@@ -1867,7 +1869,7 @@
             <a:r>
               <a:rPr lang="en-US" sz="1000">
                 <a:solidFill>
-                  <a:srgbClr val="607184"/>
+                  <a:srgbClr val="898989"/>
                 </a:solidFill>
                 <a:latin typeface="Arial"/>
                 <a:ea typeface="Arial"/>
@@ -1899,13 +1901,13 @@
         <a:srgbClr val="E7E6E6"/>
       </a:lt2>
       <a:accent1>
-        <a:srgbClr val="183B56"/>
+        <a:srgbClr val="C00000"/>
       </a:accent1>
       <a:accent2>
-        <a:srgbClr val="008C95"/>
+        <a:srgbClr val="70AD47"/>
       </a:accent2>
       <a:accent3>
-        <a:srgbClr val="DF973E"/>
+        <a:srgbClr val="ED7D31"/>
       </a:accent3>
       <a:accent4>
         <a:srgbClr val="FFC000"/>
